--- a/catalog/editorial/templates/ed_steps_vertical_2.pptx
+++ b/catalog/editorial/templates/ed_steps_vertical_2.pptx
@@ -3577,7 +3577,7 @@
           <a:noFill/>
         </p:spPr>
         <p:txBody>
-          <a:bodyPr wrap="square" lIns="18288" rIns="18288" tIns="13716" bIns="13716">
+          <a:bodyPr wrap="square" anchor="t" lIns="18288" rIns="18288" tIns="13716" bIns="13716">
             <a:noAutofit/>
           </a:bodyPr>
           <a:lstStyle/>
@@ -3632,7 +3632,7 @@
           <a:noFill/>
         </p:spPr>
         <p:txBody>
-          <a:bodyPr wrap="square" lIns="18288" rIns="18288" tIns="13716" bIns="13716">
+          <a:bodyPr wrap="square" anchor="t" lIns="18288" rIns="18288" tIns="13716" bIns="13716">
             <a:noAutofit/>
           </a:bodyPr>
           <a:lstStyle/>
@@ -3687,7 +3687,7 @@
           <a:noFill/>
         </p:spPr>
         <p:txBody>
-          <a:bodyPr wrap="square" lIns="18288" rIns="18288" tIns="13716" bIns="13716">
+          <a:bodyPr wrap="square" anchor="t" lIns="18288" rIns="18288" tIns="13716" bIns="13716">
             <a:noAutofit/>
           </a:bodyPr>
           <a:lstStyle/>
@@ -3786,7 +3786,7 @@
           <a:noFill/>
         </p:spPr>
         <p:txBody>
-          <a:bodyPr wrap="square" lIns="18288" rIns="18288" tIns="13716" bIns="13716">
+          <a:bodyPr wrap="square" anchor="t" lIns="18288" rIns="18288" tIns="13716" bIns="13716">
             <a:noAutofit/>
           </a:bodyPr>
           <a:lstStyle/>
@@ -3841,7 +3841,7 @@
           <a:noFill/>
         </p:spPr>
         <p:txBody>
-          <a:bodyPr wrap="square" lIns="18288" rIns="18288" tIns="13716" bIns="13716">
+          <a:bodyPr wrap="square" anchor="t" lIns="18288" rIns="18288" tIns="13716" bIns="13716">
             <a:noAutofit/>
           </a:bodyPr>
           <a:lstStyle/>
@@ -3976,7 +3976,7 @@
         <p:spPr>
           <a:xfrm>
             <a:off x="1234440" y="2167127"/>
-            <a:ext cx="411480" cy="365760"/>
+            <a:ext cx="411480" cy="1888236"/>
           </a:xfrm>
           <a:prstGeom prst="rect">
             <a:avLst/>
@@ -3984,7 +3984,7 @@
           <a:noFill/>
         </p:spPr>
         <p:txBody>
-          <a:bodyPr wrap="square" lIns="18288" rIns="18288" tIns="13716" bIns="13716">
+          <a:bodyPr wrap="square" anchor="ctr" lIns="18288" rIns="18288" tIns="13716" bIns="13716">
             <a:noAutofit/>
           </a:bodyPr>
           <a:lstStyle/>
@@ -4030,8 +4030,8 @@
         </p:nvSpPr>
         <p:spPr>
           <a:xfrm>
-            <a:off x="1755648" y="2157984"/>
-            <a:ext cx="2542032" cy="685800"/>
+            <a:off x="1755648" y="2167127"/>
+            <a:ext cx="2542032" cy="1888236"/>
           </a:xfrm>
           <a:prstGeom prst="rect">
             <a:avLst/>
@@ -4039,7 +4039,7 @@
           <a:noFill/>
         </p:spPr>
         <p:txBody>
-          <a:bodyPr wrap="square" lIns="18288" rIns="18288" tIns="13716" bIns="13716">
+          <a:bodyPr wrap="square" anchor="ctr" lIns="18288" rIns="18288" tIns="13716" bIns="13716">
             <a:noAutofit/>
           </a:bodyPr>
           <a:lstStyle/>
@@ -4085,8 +4085,8 @@
         </p:nvSpPr>
         <p:spPr>
           <a:xfrm>
-            <a:off x="4507992" y="2157984"/>
-            <a:ext cx="7013448" cy="1915668"/>
+            <a:off x="4507992" y="2167127"/>
+            <a:ext cx="7013448" cy="1888236"/>
           </a:xfrm>
           <a:prstGeom prst="rect">
             <a:avLst/>
@@ -4094,7 +4094,7 @@
           <a:noFill/>
         </p:spPr>
         <p:txBody>
-          <a:bodyPr wrap="square" lIns="18288" rIns="18288" tIns="13716" bIns="13716">
+          <a:bodyPr wrap="square" anchor="ctr" lIns="18288" rIns="18288" tIns="13716" bIns="13716">
             <a:noAutofit/>
           </a:bodyPr>
           <a:lstStyle/>
@@ -4185,7 +4185,7 @@
         <p:spPr>
           <a:xfrm>
             <a:off x="1234440" y="4110228"/>
-            <a:ext cx="411480" cy="365760"/>
+            <a:ext cx="411480" cy="1888236"/>
           </a:xfrm>
           <a:prstGeom prst="rect">
             <a:avLst/>
@@ -4193,7 +4193,7 @@
           <a:noFill/>
         </p:spPr>
         <p:txBody>
-          <a:bodyPr wrap="square" lIns="18288" rIns="18288" tIns="13716" bIns="13716">
+          <a:bodyPr wrap="square" anchor="ctr" lIns="18288" rIns="18288" tIns="13716" bIns="13716">
             <a:noAutofit/>
           </a:bodyPr>
           <a:lstStyle/>
@@ -4239,8 +4239,8 @@
         </p:nvSpPr>
         <p:spPr>
           <a:xfrm>
-            <a:off x="1755648" y="4101083"/>
-            <a:ext cx="2542032" cy="685800"/>
+            <a:off x="1755648" y="4110228"/>
+            <a:ext cx="2542032" cy="1888236"/>
           </a:xfrm>
           <a:prstGeom prst="rect">
             <a:avLst/>
@@ -4248,7 +4248,7 @@
           <a:noFill/>
         </p:spPr>
         <p:txBody>
-          <a:bodyPr wrap="square" lIns="18288" rIns="18288" tIns="13716" bIns="13716">
+          <a:bodyPr wrap="square" anchor="ctr" lIns="18288" rIns="18288" tIns="13716" bIns="13716">
             <a:noAutofit/>
           </a:bodyPr>
           <a:lstStyle/>
@@ -4294,8 +4294,8 @@
         </p:nvSpPr>
         <p:spPr>
           <a:xfrm>
-            <a:off x="4507992" y="4101083"/>
-            <a:ext cx="7013448" cy="1915668"/>
+            <a:off x="4507992" y="4110228"/>
+            <a:ext cx="7013448" cy="1888236"/>
           </a:xfrm>
           <a:prstGeom prst="rect">
             <a:avLst/>
@@ -4303,7 +4303,7 @@
           <a:noFill/>
         </p:spPr>
         <p:txBody>
-          <a:bodyPr wrap="square" lIns="18288" rIns="18288" tIns="13716" bIns="13716">
+          <a:bodyPr wrap="square" anchor="ctr" lIns="18288" rIns="18288" tIns="13716" bIns="13716">
             <a:noAutofit/>
           </a:bodyPr>
           <a:lstStyle/>
